--- a/submission/GCB/figures_SI/FigS3.pptx
+++ b/submission/GCB/figures_SI/FigS3.pptx
@@ -478,7 +478,7 @@
         </p:nvSpPr>
         <p:spPr>
           <a:xfrm>
-            <a:off x="500400" y="2355120"/>
+            <a:off x="500400" y="2354040"/>
             <a:ext cx="1299240" cy="0"/>
           </a:xfrm>
           <a:prstGeom prst="line">
@@ -521,7 +521,7 @@
         </p:nvSpPr>
         <p:spPr>
           <a:xfrm>
-            <a:off x="500400" y="1801080"/>
+            <a:off x="500400" y="1799280"/>
             <a:ext cx="1299240" cy="0"/>
           </a:xfrm>
           <a:prstGeom prst="line">
@@ -564,7 +564,7 @@
         </p:nvSpPr>
         <p:spPr>
           <a:xfrm>
-            <a:off x="500400" y="1247400"/>
+            <a:off x="500400" y="1244520"/>
             <a:ext cx="1299240" cy="0"/>
           </a:xfrm>
           <a:prstGeom prst="line">
@@ -667,8 +667,8 @@
         </p:nvSpPr>
         <p:spPr>
           <a:xfrm>
-            <a:off x="1024200" y="1873800"/>
-            <a:ext cx="252000" cy="1035360"/>
+            <a:off x="1024200" y="1873440"/>
+            <a:ext cx="252000" cy="1035720"/>
           </a:xfrm>
           <a:custGeom>
             <a:avLst/>
@@ -676,7 +676,7 @@
             <a:ahLst/>
             <a:rect l="0" t="0" r="r" b="b"/>
             <a:pathLst>
-              <a:path w="700" h="2876">
+              <a:path w="700" h="2877">
                 <a:moveTo>
                   <a:pt x="0" y="0"/>
                 </a:moveTo>
@@ -684,10 +684,10 @@
                   <a:pt x="700" y="0"/>
                 </a:lnTo>
                 <a:lnTo>
-                  <a:pt x="700" y="2876"/>
+                  <a:pt x="700" y="2877"/>
                 </a:lnTo>
                 <a:lnTo>
-                  <a:pt x="0" y="2876"/>
+                  <a:pt x="0" y="2877"/>
                 </a:lnTo>
                 <a:lnTo>
                   <a:pt x="0" y="0"/>
@@ -727,8 +727,8 @@
         </p:nvSpPr>
         <p:spPr>
           <a:xfrm>
-            <a:off x="1430280" y="1258560"/>
-            <a:ext cx="252000" cy="1650600"/>
+            <a:off x="1430280" y="1258200"/>
+            <a:ext cx="252000" cy="1650960"/>
           </a:xfrm>
           <a:custGeom>
             <a:avLst/>
@@ -736,7 +736,7 @@
             <a:ahLst/>
             <a:rect l="0" t="0" r="r" b="b"/>
             <a:pathLst>
-              <a:path w="700" h="4585">
+              <a:path w="700" h="4586">
                 <a:moveTo>
                   <a:pt x="0" y="0"/>
                 </a:moveTo>
@@ -744,10 +744,10 @@
                   <a:pt x="700" y="0"/>
                 </a:lnTo>
                 <a:lnTo>
-                  <a:pt x="700" y="4585"/>
+                  <a:pt x="700" y="4586"/>
                 </a:lnTo>
                 <a:lnTo>
-                  <a:pt x="0" y="4585"/>
+                  <a:pt x="0" y="4586"/>
                 </a:lnTo>
                 <a:lnTo>
                   <a:pt x="0" y="0"/>
@@ -1338,7 +1338,7 @@
         </p:nvSpPr>
         <p:spPr>
           <a:xfrm>
-            <a:off x="1480320" y="1155960"/>
+            <a:off x="1480320" y="1155600"/>
             <a:ext cx="145800" cy="90360"/>
           </a:xfrm>
           <a:prstGeom prst="rect">
@@ -4222,7 +4222,7 @@
         </p:nvSpPr>
         <p:spPr>
           <a:xfrm>
-            <a:off x="342000" y="2304360"/>
+            <a:off x="342000" y="2303640"/>
             <a:ext cx="114120" cy="102600"/>
           </a:xfrm>
           <a:prstGeom prst="rect">
@@ -4270,7 +4270,7 @@
         </p:nvSpPr>
         <p:spPr>
           <a:xfrm>
-            <a:off x="342000" y="1750680"/>
+            <a:off x="342000" y="1748880"/>
             <a:ext cx="114120" cy="102600"/>
           </a:xfrm>
           <a:prstGeom prst="rect">
@@ -4361,7 +4361,7 @@
         </p:nvSpPr>
         <p:spPr>
           <a:xfrm>
-            <a:off x="468720" y="2355120"/>
+            <a:off x="468720" y="2354040"/>
             <a:ext cx="31680" cy="0"/>
           </a:xfrm>
           <a:prstGeom prst="line">
@@ -4404,7 +4404,7 @@
         </p:nvSpPr>
         <p:spPr>
           <a:xfrm>
-            <a:off x="468720" y="1801080"/>
+            <a:off x="468720" y="1799280"/>
             <a:ext cx="31680" cy="0"/>
           </a:xfrm>
           <a:prstGeom prst="line">
@@ -4447,7 +4447,7 @@
         </p:nvSpPr>
         <p:spPr>
           <a:xfrm>
-            <a:off x="468720" y="1247400"/>
+            <a:off x="468720" y="1244520"/>
             <a:ext cx="31680" cy="0"/>
           </a:xfrm>
           <a:prstGeom prst="line">
@@ -4490,7 +4490,7 @@
         </p:nvSpPr>
         <p:spPr>
           <a:xfrm>
-            <a:off x="342000" y="1196640"/>
+            <a:off x="342000" y="1194120"/>
             <a:ext cx="114120" cy="102600"/>
           </a:xfrm>
           <a:prstGeom prst="rect">
@@ -4740,8 +4740,8 @@
         </p:nvSpPr>
         <p:spPr>
           <a:xfrm>
-            <a:off x="6279840" y="2509560"/>
-            <a:ext cx="1077480" cy="0"/>
+            <a:off x="6274440" y="2509560"/>
+            <a:ext cx="1060560" cy="0"/>
           </a:xfrm>
           <a:prstGeom prst="line">
             <a:avLst/>
@@ -4783,8 +4783,8 @@
         </p:nvSpPr>
         <p:spPr>
           <a:xfrm>
-            <a:off x="6489000" y="1844280"/>
-            <a:ext cx="1401120" cy="0"/>
+            <a:off x="6478200" y="1844280"/>
+            <a:ext cx="1411920" cy="0"/>
           </a:xfrm>
           <a:prstGeom prst="line">
             <a:avLst/>
@@ -4826,8 +4826,8 @@
         </p:nvSpPr>
         <p:spPr>
           <a:xfrm>
-            <a:off x="6537960" y="1178640"/>
-            <a:ext cx="1320120" cy="0"/>
+            <a:off x="6526800" y="1178640"/>
+            <a:ext cx="1297440" cy="0"/>
           </a:xfrm>
           <a:prstGeom prst="line">
             <a:avLst/>
@@ -4869,7 +4869,7 @@
         </p:nvSpPr>
         <p:spPr>
           <a:xfrm>
-            <a:off x="6742080" y="2477160"/>
+            <a:off x="6729120" y="2477160"/>
             <a:ext cx="65520" cy="65520"/>
           </a:xfrm>
           <a:custGeom>
@@ -4927,7 +4927,7 @@
         </p:nvSpPr>
         <p:spPr>
           <a:xfrm>
-            <a:off x="6742080" y="2477160"/>
+            <a:off x="6729120" y="2477160"/>
             <a:ext cx="65520" cy="65520"/>
           </a:xfrm>
           <a:custGeom>
@@ -4984,7 +4984,7 @@
         </p:nvSpPr>
         <p:spPr>
           <a:xfrm>
-            <a:off x="7090200" y="1811520"/>
+            <a:off x="7083000" y="1811520"/>
             <a:ext cx="65520" cy="65520"/>
           </a:xfrm>
           <a:custGeom>
@@ -5042,7 +5042,7 @@
         </p:nvSpPr>
         <p:spPr>
           <a:xfrm>
-            <a:off x="7090200" y="1811520"/>
+            <a:off x="7083000" y="1811520"/>
             <a:ext cx="65520" cy="65520"/>
           </a:xfrm>
           <a:custGeom>
@@ -5099,8 +5099,8 @@
         </p:nvSpPr>
         <p:spPr>
           <a:xfrm>
-            <a:off x="7106400" y="1146240"/>
-            <a:ext cx="65520" cy="65520"/>
+            <a:off x="7085160" y="1146240"/>
+            <a:ext cx="65160" cy="65520"/>
           </a:xfrm>
           <a:custGeom>
             <a:avLst/>
@@ -5108,17 +5108,17 @@
             <a:ahLst/>
             <a:rect l="0" t="0" r="r" b="b"/>
             <a:pathLst>
-              <a:path w="182" h="182">
+              <a:path w="181" h="182">
                 <a:moveTo>
                   <a:pt x="0" y="90"/>
                 </a:moveTo>
                 <a:cubicBezTo>
                   <a:pt x="0" y="-30"/>
-                  <a:pt x="182" y="-30"/>
-                  <a:pt x="182" y="90"/>
+                  <a:pt x="181" y="-30"/>
+                  <a:pt x="181" y="90"/>
                 </a:cubicBezTo>
                 <a:cubicBezTo>
-                  <a:pt x="182" y="212"/>
+                  <a:pt x="181" y="212"/>
                   <a:pt x="0" y="212"/>
                   <a:pt x="0" y="90"/>
                 </a:cubicBezTo>
@@ -5157,8 +5157,8 @@
         </p:nvSpPr>
         <p:spPr>
           <a:xfrm>
-            <a:off x="7106400" y="1146240"/>
-            <a:ext cx="65520" cy="65520"/>
+            <a:off x="7085160" y="1146240"/>
+            <a:ext cx="65160" cy="65520"/>
           </a:xfrm>
           <a:custGeom>
             <a:avLst/>
@@ -5166,19 +5166,19 @@
             <a:ahLst/>
             <a:rect l="0" t="0" r="r" b="b"/>
             <a:pathLst>
-              <a:path fill="none" w="182" h="182">
+              <a:path fill="none" w="181" h="182">
                 <a:moveTo>
-                  <a:pt x="182" y="90"/>
+                  <a:pt x="181" y="90"/>
                 </a:moveTo>
                 <a:cubicBezTo>
-                  <a:pt x="182" y="212"/>
+                  <a:pt x="181" y="212"/>
                   <a:pt x="0" y="212"/>
                   <a:pt x="0" y="90"/>
                 </a:cubicBezTo>
                 <a:cubicBezTo>
                   <a:pt x="0" y="-30"/>
-                  <a:pt x="182" y="-30"/>
-                  <a:pt x="182" y="90"/>
+                  <a:pt x="181" y="-30"/>
+                  <a:pt x="181" y="90"/>
                 </a:cubicBezTo>
               </a:path>
             </a:pathLst>
@@ -5262,7 +5262,7 @@
         </p:nvSpPr>
         <p:spPr>
           <a:xfrm>
-            <a:off x="6685920" y="2370240"/>
+            <a:off x="6672960" y="2370240"/>
             <a:ext cx="169920" cy="87120"/>
           </a:xfrm>
           <a:prstGeom prst="rect">
@@ -5310,7 +5310,7 @@
         </p:nvSpPr>
         <p:spPr>
           <a:xfrm>
-            <a:off x="7034040" y="1704600"/>
+            <a:off x="7026840" y="1704600"/>
             <a:ext cx="169920" cy="87120"/>
           </a:xfrm>
           <a:prstGeom prst="rect">
@@ -5464,8 +5464,8 @@
         </p:nvSpPr>
         <p:spPr>
           <a:xfrm>
-            <a:off x="8418240" y="2509560"/>
-            <a:ext cx="955440" cy="0"/>
+            <a:off x="8401320" y="2509560"/>
+            <a:ext cx="937440" cy="0"/>
           </a:xfrm>
           <a:prstGeom prst="line">
             <a:avLst/>
@@ -5507,8 +5507,8 @@
         </p:nvSpPr>
         <p:spPr>
           <a:xfrm>
-            <a:off x="8225280" y="1844280"/>
-            <a:ext cx="1292760" cy="0"/>
+            <a:off x="8352720" y="1844280"/>
+            <a:ext cx="1347120" cy="0"/>
           </a:xfrm>
           <a:prstGeom prst="line">
             <a:avLst/>
@@ -5550,8 +5550,8 @@
         </p:nvSpPr>
         <p:spPr>
           <a:xfrm>
-            <a:off x="8466840" y="1178640"/>
-            <a:ext cx="1126800" cy="0"/>
+            <a:off x="8442360" y="1178640"/>
+            <a:ext cx="1099800" cy="0"/>
           </a:xfrm>
           <a:prstGeom prst="line">
             <a:avLst/>
@@ -5593,7 +5593,7 @@
         </p:nvSpPr>
         <p:spPr>
           <a:xfrm>
-            <a:off x="8826840" y="2477160"/>
+            <a:off x="8801640" y="2477160"/>
             <a:ext cx="65520" cy="65520"/>
           </a:xfrm>
           <a:custGeom>
@@ -5651,7 +5651,7 @@
         </p:nvSpPr>
         <p:spPr>
           <a:xfrm>
-            <a:off x="8826840" y="2477160"/>
+            <a:off x="8801640" y="2477160"/>
             <a:ext cx="65520" cy="65520"/>
           </a:xfrm>
           <a:custGeom>
@@ -5708,8 +5708,8 @@
         </p:nvSpPr>
         <p:spPr>
           <a:xfrm>
-            <a:off x="8771760" y="1811520"/>
-            <a:ext cx="65160" cy="65520"/>
+            <a:off x="8923320" y="1811520"/>
+            <a:ext cx="65520" cy="65520"/>
           </a:xfrm>
           <a:custGeom>
             <a:avLst/>
@@ -5717,17 +5717,17 @@
             <a:ahLst/>
             <a:rect l="0" t="0" r="r" b="b"/>
             <a:pathLst>
-              <a:path w="181" h="182">
+              <a:path w="182" h="182">
                 <a:moveTo>
                   <a:pt x="0" y="91"/>
                 </a:moveTo>
                 <a:cubicBezTo>
                   <a:pt x="0" y="-30"/>
-                  <a:pt x="181" y="-30"/>
-                  <a:pt x="181" y="91"/>
+                  <a:pt x="182" y="-30"/>
+                  <a:pt x="182" y="91"/>
                 </a:cubicBezTo>
                 <a:cubicBezTo>
-                  <a:pt x="181" y="212"/>
+                  <a:pt x="182" y="212"/>
                   <a:pt x="0" y="212"/>
                   <a:pt x="0" y="91"/>
                 </a:cubicBezTo>
@@ -5766,8 +5766,8 @@
         </p:nvSpPr>
         <p:spPr>
           <a:xfrm>
-            <a:off x="8771760" y="1811520"/>
-            <a:ext cx="65160" cy="65520"/>
+            <a:off x="8923320" y="1811520"/>
+            <a:ext cx="65520" cy="65520"/>
           </a:xfrm>
           <a:custGeom>
             <a:avLst/>
@@ -5775,19 +5775,19 @@
             <a:ahLst/>
             <a:rect l="0" t="0" r="r" b="b"/>
             <a:pathLst>
-              <a:path fill="none" w="181" h="182">
+              <a:path fill="none" w="182" h="182">
                 <a:moveTo>
-                  <a:pt x="181" y="91"/>
+                  <a:pt x="182" y="91"/>
                 </a:moveTo>
                 <a:cubicBezTo>
-                  <a:pt x="181" y="212"/>
+                  <a:pt x="182" y="212"/>
                   <a:pt x="0" y="212"/>
                   <a:pt x="0" y="91"/>
                 </a:cubicBezTo>
                 <a:cubicBezTo>
                   <a:pt x="0" y="-30"/>
-                  <a:pt x="181" y="-30"/>
-                  <a:pt x="181" y="91"/>
+                  <a:pt x="182" y="-30"/>
+                  <a:pt x="182" y="91"/>
                 </a:cubicBezTo>
               </a:path>
             </a:pathLst>
@@ -5823,7 +5823,7 @@
         </p:nvSpPr>
         <p:spPr>
           <a:xfrm>
-            <a:off x="8948880" y="1146240"/>
+            <a:off x="8912160" y="1146240"/>
             <a:ext cx="65520" cy="65520"/>
           </a:xfrm>
           <a:custGeom>
@@ -5881,7 +5881,7 @@
         </p:nvSpPr>
         <p:spPr>
           <a:xfrm>
-            <a:off x="8948880" y="1146240"/>
+            <a:off x="8912160" y="1146240"/>
             <a:ext cx="65520" cy="65520"/>
           </a:xfrm>
           <a:custGeom>
@@ -5938,7 +5938,7 @@
         </p:nvSpPr>
         <p:spPr>
           <a:xfrm>
-            <a:off x="7050240" y="1039320"/>
+            <a:off x="7029000" y="1039320"/>
             <a:ext cx="169920" cy="87120"/>
           </a:xfrm>
           <a:prstGeom prst="rect">
@@ -5986,7 +5986,7 @@
         </p:nvSpPr>
         <p:spPr>
           <a:xfrm>
-            <a:off x="8770680" y="2370240"/>
+            <a:off x="8745480" y="2370240"/>
             <a:ext cx="169920" cy="87120"/>
           </a:xfrm>
           <a:prstGeom prst="rect">
@@ -6034,55 +6034,7 @@
         </p:nvSpPr>
         <p:spPr>
           <a:xfrm>
-            <a:off x="8715600" y="1704600"/>
-            <a:ext cx="169920" cy="87120"/>
-          </a:xfrm>
-          <a:prstGeom prst="rect">
-            <a:avLst/>
-          </a:prstGeom>
-          <a:noFill/>
-          <a:ln w="0">
-            <a:noFill/>
-          </a:ln>
-        </p:spPr>
-        <p:txBody>
-          <a:bodyPr wrap="none" lIns="0" tIns="0" rIns="0" bIns="0" anchor="t">
-            <a:spAutoFit/>
-          </a:bodyPr>
-          <a:p>
-            <a:pPr/>
-            <a:r>
-              <a:rPr lang="en-US" sz="690" b="0" u="none" strike="noStrike">
-                <a:solidFill>
-                  <a:srgbClr val="333333"/>
-                </a:solidFill>
-                <a:effectLst/>
-                <a:uFillTx/>
-                <a:latin typeface="Arial"/>
-                <a:ea typeface="Arial"/>
-              </a:rPr>
-              <a:t>1.27</a:t>
-            </a:r>
-            <a:endParaRPr lang="en-US" sz="690" b="0" u="none" strike="noStrike">
-              <a:solidFill>
-                <a:srgbClr val="000000"/>
-              </a:solidFill>
-              <a:effectLst/>
-              <a:uFillTx/>
-              <a:latin typeface="Times New Roman"/>
-            </a:endParaRPr>
-          </a:p>
-        </p:txBody>
-      </p:sp>
-      <p:sp>
-        <p:nvSpPr>
-          <p:cNvPr id="125" name=""/>
-          <p:cNvSpPr txBox="1"/>
-          <p:nvPr/>
-        </p:nvSpPr>
-        <p:spPr>
-          <a:xfrm>
-            <a:off x="8892720" y="1039320"/>
+            <a:off x="8867160" y="1704600"/>
             <a:ext cx="169920" cy="87120"/>
           </a:xfrm>
           <a:prstGeom prst="rect">
@@ -6124,6 +6076,54 @@
       </p:sp>
       <p:sp>
         <p:nvSpPr>
+          <p:cNvPr id="125" name=""/>
+          <p:cNvSpPr txBox="1"/>
+          <p:nvPr/>
+        </p:nvSpPr>
+        <p:spPr>
+          <a:xfrm>
+            <a:off x="8856000" y="1039320"/>
+            <a:ext cx="169920" cy="87120"/>
+          </a:xfrm>
+          <a:prstGeom prst="rect">
+            <a:avLst/>
+          </a:prstGeom>
+          <a:noFill/>
+          <a:ln w="0">
+            <a:noFill/>
+          </a:ln>
+        </p:spPr>
+        <p:txBody>
+          <a:bodyPr wrap="none" lIns="0" tIns="0" rIns="0" bIns="0" anchor="t">
+            <a:spAutoFit/>
+          </a:bodyPr>
+          <a:p>
+            <a:pPr/>
+            <a:r>
+              <a:rPr lang="en-US" sz="690" b="0" u="none" strike="noStrike">
+                <a:solidFill>
+                  <a:srgbClr val="333333"/>
+                </a:solidFill>
+                <a:effectLst/>
+                <a:uFillTx/>
+                <a:latin typeface="Arial"/>
+                <a:ea typeface="Arial"/>
+              </a:rPr>
+              <a:t>1.33</a:t>
+            </a:r>
+            <a:endParaRPr lang="en-US" sz="690" b="0" u="none" strike="noStrike">
+              <a:solidFill>
+                <a:srgbClr val="000000"/>
+              </a:solidFill>
+              <a:effectLst/>
+              <a:uFillTx/>
+              <a:latin typeface="Times New Roman"/>
+            </a:endParaRPr>
+          </a:p>
+        </p:txBody>
+      </p:sp>
+      <p:sp>
+        <p:nvSpPr>
           <p:cNvPr id="126" name=""/>
           <p:cNvSpPr txBox="1"/>
           <p:nvPr/>
@@ -6264,7 +6264,7 @@
         </p:nvSpPr>
         <p:spPr>
           <a:xfrm flipV="1">
-            <a:off x="6381720" y="2908800"/>
+            <a:off x="6375240" y="2908800"/>
             <a:ext cx="0" cy="31680"/>
           </a:xfrm>
           <a:prstGeom prst="line">
@@ -6307,7 +6307,7 @@
         </p:nvSpPr>
         <p:spPr>
           <a:xfrm flipV="1">
-            <a:off x="6863760" y="2908800"/>
+            <a:off x="6850800" y="2908800"/>
             <a:ext cx="0" cy="31680"/>
           </a:xfrm>
           <a:prstGeom prst="line">
@@ -6350,7 +6350,7 @@
         </p:nvSpPr>
         <p:spPr>
           <a:xfrm flipV="1">
-            <a:off x="7346160" y="2908800"/>
+            <a:off x="7326360" y="2908800"/>
             <a:ext cx="0" cy="31680"/>
           </a:xfrm>
           <a:prstGeom prst="line">
@@ -6393,7 +6393,7 @@
         </p:nvSpPr>
         <p:spPr>
           <a:xfrm flipV="1">
-            <a:off x="7828200" y="2908800"/>
+            <a:off x="7801920" y="2908800"/>
             <a:ext cx="0" cy="31680"/>
           </a:xfrm>
           <a:prstGeom prst="line">
@@ -6532,7 +6532,7 @@
         </p:nvSpPr>
         <p:spPr>
           <a:xfrm>
-            <a:off x="6318360" y="2953440"/>
+            <a:off x="6311880" y="2953440"/>
             <a:ext cx="142560" cy="102600"/>
           </a:xfrm>
           <a:prstGeom prst="rect">
@@ -6580,7 +6580,7 @@
         </p:nvSpPr>
         <p:spPr>
           <a:xfrm>
-            <a:off x="6800400" y="2953440"/>
+            <a:off x="6787440" y="2953440"/>
             <a:ext cx="142560" cy="102600"/>
           </a:xfrm>
           <a:prstGeom prst="rect">
@@ -6628,7 +6628,7 @@
         </p:nvSpPr>
         <p:spPr>
           <a:xfrm>
-            <a:off x="7282800" y="2953440"/>
+            <a:off x="7263000" y="2953440"/>
             <a:ext cx="142560" cy="102600"/>
           </a:xfrm>
           <a:prstGeom prst="rect">
@@ -6762,7 +6762,7 @@
         </p:nvSpPr>
         <p:spPr>
           <a:xfrm flipV="1">
-            <a:off x="8634960" y="2908800"/>
+            <a:off x="8628120" y="2908800"/>
             <a:ext cx="0" cy="31680"/>
           </a:xfrm>
           <a:prstGeom prst="line">
@@ -6805,7 +6805,7 @@
         </p:nvSpPr>
         <p:spPr>
           <a:xfrm flipV="1">
-            <a:off x="9117000" y="2908800"/>
+            <a:off x="9104040" y="2908800"/>
             <a:ext cx="0" cy="31680"/>
           </a:xfrm>
           <a:prstGeom prst="line">
@@ -6848,7 +6848,7 @@
         </p:nvSpPr>
         <p:spPr>
           <a:xfrm flipV="1">
-            <a:off x="9599400" y="2908800"/>
+            <a:off x="9579600" y="2908800"/>
             <a:ext cx="0" cy="31680"/>
           </a:xfrm>
           <a:prstGeom prst="line">
@@ -6891,7 +6891,7 @@
         </p:nvSpPr>
         <p:spPr>
           <a:xfrm flipV="1">
-            <a:off x="10081440" y="2908800"/>
+            <a:off x="10055160" y="2908800"/>
             <a:ext cx="0" cy="31680"/>
           </a:xfrm>
           <a:prstGeom prst="line">
@@ -6934,7 +6934,7 @@
         </p:nvSpPr>
         <p:spPr>
           <a:xfrm>
-            <a:off x="7764840" y="2953440"/>
+            <a:off x="7738920" y="2953440"/>
             <a:ext cx="142560" cy="102600"/>
           </a:xfrm>
           <a:prstGeom prst="rect">
@@ -7030,7 +7030,7 @@
         </p:nvSpPr>
         <p:spPr>
           <a:xfrm>
-            <a:off x="8571600" y="2953440"/>
+            <a:off x="8565120" y="2953440"/>
             <a:ext cx="142560" cy="102600"/>
           </a:xfrm>
           <a:prstGeom prst="rect">
@@ -7078,7 +7078,7 @@
         </p:nvSpPr>
         <p:spPr>
           <a:xfrm>
-            <a:off x="9053640" y="2953440"/>
+            <a:off x="9040680" y="2953440"/>
             <a:ext cx="142560" cy="102600"/>
           </a:xfrm>
           <a:prstGeom prst="rect">
@@ -7126,7 +7126,7 @@
         </p:nvSpPr>
         <p:spPr>
           <a:xfrm>
-            <a:off x="9536040" y="2953440"/>
+            <a:off x="9516240" y="2953440"/>
             <a:ext cx="142560" cy="102600"/>
           </a:xfrm>
           <a:prstGeom prst="rect">
@@ -7217,7 +7217,7 @@
         </p:nvSpPr>
         <p:spPr>
           <a:xfrm>
-            <a:off x="10018080" y="2953440"/>
+            <a:off x="9991800" y="2953440"/>
             <a:ext cx="142560" cy="102600"/>
           </a:xfrm>
           <a:prstGeom prst="rect">
@@ -7868,7 +7868,7 @@
         </p:nvSpPr>
         <p:spPr>
           <a:xfrm>
-            <a:off x="500400" y="5941440"/>
+            <a:off x="500400" y="5889600"/>
             <a:ext cx="4443120" cy="0"/>
           </a:xfrm>
           <a:prstGeom prst="line">
@@ -7911,7 +7911,7 @@
         </p:nvSpPr>
         <p:spPr>
           <a:xfrm>
-            <a:off x="500400" y="5411880"/>
+            <a:off x="500400" y="5307480"/>
             <a:ext cx="4443120" cy="0"/>
           </a:xfrm>
           <a:prstGeom prst="line">
@@ -7954,7 +7954,7 @@
         </p:nvSpPr>
         <p:spPr>
           <a:xfrm>
-            <a:off x="500400" y="4881960"/>
+            <a:off x="500400" y="4725720"/>
             <a:ext cx="4443120" cy="0"/>
           </a:xfrm>
           <a:prstGeom prst="line">
@@ -7997,51 +7997,8 @@
         </p:nvSpPr>
         <p:spPr>
           <a:xfrm>
-            <a:off x="500400" y="4352040"/>
-            <a:ext cx="4443120" cy="0"/>
-          </a:xfrm>
-          <a:prstGeom prst="line">
-            <a:avLst/>
-          </a:prstGeom>
-          <a:ln w="6480">
-            <a:solidFill>
-              <a:srgbClr val="EBEBEB"/>
-            </a:solidFill>
-            <a:round/>
-          </a:ln>
-        </p:spPr>
-        <p:style>
-          <a:lnRef idx="0"/>
-          <a:fillRef idx="0"/>
-          <a:effectRef idx="0"/>
-          <a:fontRef idx="minor"/>
-        </p:style>
-        <p:txBody>
-          <a:bodyPr lIns="3240" tIns="-3240" rIns="3240" bIns="-3240" anchor="t">
-            <a:noAutofit/>
-          </a:bodyPr>
-          <a:p>
-            <a:endParaRPr lang="en-US" sz="2400" b="0" u="none" strike="noStrike">
-              <a:solidFill>
-                <a:srgbClr val="000000"/>
-              </a:solidFill>
-              <a:effectLst/>
-              <a:uFillTx/>
-              <a:latin typeface="Times New Roman"/>
-            </a:endParaRPr>
-          </a:p>
-        </p:txBody>
-      </p:sp>
-      <p:sp>
-        <p:nvSpPr>
-          <p:cNvPr id="167" name=""/>
-          <p:cNvSpPr/>
-          <p:nvPr/>
-        </p:nvSpPr>
-        <p:spPr>
-          <a:xfrm>
-            <a:off x="708480" y="4829040"/>
-            <a:ext cx="444600" cy="1642680"/>
+            <a:off x="708480" y="4670640"/>
+            <a:ext cx="444600" cy="1801080"/>
           </a:xfrm>
           <a:custGeom>
             <a:avLst/>
@@ -8049,7 +8006,7 @@
             <a:ahLst/>
             <a:rect l="0" t="0" r="r" b="b"/>
             <a:pathLst>
-              <a:path w="1235" h="4563">
+              <a:path w="1235" h="5003">
                 <a:moveTo>
                   <a:pt x="0" y="0"/>
                 </a:moveTo>
@@ -8057,10 +8014,10 @@
                   <a:pt x="1235" y="0"/>
                 </a:lnTo>
                 <a:lnTo>
-                  <a:pt x="1235" y="4563"/>
+                  <a:pt x="1235" y="5003"/>
                 </a:lnTo>
                 <a:lnTo>
-                  <a:pt x="0" y="4563"/>
+                  <a:pt x="0" y="5003"/>
                 </a:lnTo>
                 <a:lnTo>
                   <a:pt x="0" y="0"/>
@@ -8094,14 +8051,14 @@
       </p:sp>
       <p:sp>
         <p:nvSpPr>
-          <p:cNvPr id="168" name=""/>
-          <p:cNvSpPr/>
-          <p:nvPr/>
-        </p:nvSpPr>
-        <p:spPr>
-          <a:xfrm>
-            <a:off x="2141640" y="5605200"/>
-            <a:ext cx="444600" cy="866520"/>
+          <p:cNvPr id="167" name=""/>
+          <p:cNvSpPr/>
+          <p:nvPr/>
+        </p:nvSpPr>
+        <p:spPr>
+          <a:xfrm>
+            <a:off x="2141640" y="5522760"/>
+            <a:ext cx="444600" cy="948960"/>
           </a:xfrm>
           <a:custGeom>
             <a:avLst/>
@@ -8109,7 +8066,7 @@
             <a:ahLst/>
             <a:rect l="0" t="0" r="r" b="b"/>
             <a:pathLst>
-              <a:path w="1235" h="2407">
+              <a:path w="1235" h="2636">
                 <a:moveTo>
                   <a:pt x="0" y="0"/>
                 </a:moveTo>
@@ -8117,10 +8074,10 @@
                   <a:pt x="1235" y="0"/>
                 </a:lnTo>
                 <a:lnTo>
-                  <a:pt x="1235" y="2407"/>
+                  <a:pt x="1235" y="2636"/>
                 </a:lnTo>
                 <a:lnTo>
-                  <a:pt x="0" y="2407"/>
+                  <a:pt x="0" y="2636"/>
                 </a:lnTo>
                 <a:lnTo>
                   <a:pt x="0" y="0"/>
@@ -8154,14 +8111,14 @@
       </p:sp>
       <p:sp>
         <p:nvSpPr>
-          <p:cNvPr id="169" name=""/>
-          <p:cNvSpPr/>
-          <p:nvPr/>
-        </p:nvSpPr>
-        <p:spPr>
-          <a:xfrm>
-            <a:off x="2858040" y="5496480"/>
-            <a:ext cx="444960" cy="975240"/>
+          <p:cNvPr id="168" name=""/>
+          <p:cNvSpPr/>
+          <p:nvPr/>
+        </p:nvSpPr>
+        <p:spPr>
+          <a:xfrm>
+            <a:off x="2858040" y="5569560"/>
+            <a:ext cx="444960" cy="902160"/>
           </a:xfrm>
           <a:custGeom>
             <a:avLst/>
@@ -8169,7 +8126,7 @@
             <a:ahLst/>
             <a:rect l="0" t="0" r="r" b="b"/>
             <a:pathLst>
-              <a:path w="1236" h="2709">
+              <a:path w="1236" h="2506">
                 <a:moveTo>
                   <a:pt x="0" y="0"/>
                 </a:moveTo>
@@ -8177,10 +8134,10 @@
                   <a:pt x="1236" y="0"/>
                 </a:lnTo>
                 <a:lnTo>
-                  <a:pt x="1236" y="2709"/>
+                  <a:pt x="1236" y="2506"/>
                 </a:lnTo>
                 <a:lnTo>
-                  <a:pt x="0" y="2709"/>
+                  <a:pt x="0" y="2506"/>
                 </a:lnTo>
                 <a:lnTo>
                   <a:pt x="0" y="0"/>
@@ -8214,7 +8171,7 @@
       </p:sp>
       <p:sp>
         <p:nvSpPr>
-          <p:cNvPr id="170" name=""/>
+          <p:cNvPr id="169" name=""/>
           <p:cNvSpPr/>
           <p:nvPr/>
         </p:nvSpPr>
@@ -8274,14 +8231,14 @@
       </p:sp>
       <p:sp>
         <p:nvSpPr>
-          <p:cNvPr id="171" name=""/>
-          <p:cNvSpPr/>
-          <p:nvPr/>
-        </p:nvSpPr>
-        <p:spPr>
-          <a:xfrm>
-            <a:off x="4291560" y="5348160"/>
-            <a:ext cx="444600" cy="1123560"/>
+          <p:cNvPr id="170" name=""/>
+          <p:cNvSpPr/>
+          <p:nvPr/>
+        </p:nvSpPr>
+        <p:spPr>
+          <a:xfrm>
+            <a:off x="4291560" y="5223240"/>
+            <a:ext cx="444600" cy="1248480"/>
           </a:xfrm>
           <a:custGeom>
             <a:avLst/>
@@ -8289,7 +8246,7 @@
             <a:ahLst/>
             <a:rect l="0" t="0" r="r" b="b"/>
             <a:pathLst>
-              <a:path w="1235" h="3121">
+              <a:path w="1235" h="3468">
                 <a:moveTo>
                   <a:pt x="0" y="0"/>
                 </a:moveTo>
@@ -8297,10 +8254,10 @@
                   <a:pt x="1235" y="0"/>
                 </a:lnTo>
                 <a:lnTo>
-                  <a:pt x="1235" y="3121"/>
+                  <a:pt x="1235" y="3468"/>
                 </a:lnTo>
                 <a:lnTo>
-                  <a:pt x="0" y="3121"/>
+                  <a:pt x="0" y="3468"/>
                 </a:lnTo>
                 <a:lnTo>
                   <a:pt x="0" y="0"/>
@@ -8334,7 +8291,7 @@
       </p:sp>
       <p:sp>
         <p:nvSpPr>
-          <p:cNvPr id="172" name=""/>
+          <p:cNvPr id="171" name=""/>
           <p:cNvSpPr txBox="1"/>
           <p:nvPr/>
         </p:nvSpPr>
@@ -8382,13 +8339,13 @@
       </p:sp>
       <p:sp>
         <p:nvSpPr>
-          <p:cNvPr id="173" name=""/>
+          <p:cNvPr id="172" name=""/>
           <p:cNvSpPr txBox="1"/>
           <p:nvPr/>
         </p:nvSpPr>
         <p:spPr>
           <a:xfrm>
-            <a:off x="867240" y="4722480"/>
+            <a:off x="867240" y="4564080"/>
             <a:ext cx="132120" cy="94680"/>
           </a:xfrm>
           <a:prstGeom prst="rect">
@@ -8430,7 +8387,7 @@
       </p:sp>
       <p:sp>
         <p:nvSpPr>
-          <p:cNvPr id="174" name=""/>
+          <p:cNvPr id="173" name=""/>
           <p:cNvSpPr txBox="1"/>
           <p:nvPr/>
         </p:nvSpPr>
@@ -8478,13 +8435,13 @@
       </p:sp>
       <p:sp>
         <p:nvSpPr>
-          <p:cNvPr id="175" name=""/>
+          <p:cNvPr id="174" name=""/>
           <p:cNvSpPr txBox="1"/>
           <p:nvPr/>
         </p:nvSpPr>
         <p:spPr>
           <a:xfrm>
-            <a:off x="2300400" y="5498640"/>
+            <a:off x="2300400" y="5416560"/>
             <a:ext cx="132120" cy="94680"/>
           </a:xfrm>
           <a:prstGeom prst="rect">
@@ -8526,13 +8483,13 @@
       </p:sp>
       <p:sp>
         <p:nvSpPr>
-          <p:cNvPr id="176" name=""/>
+          <p:cNvPr id="175" name=""/>
           <p:cNvSpPr txBox="1"/>
           <p:nvPr/>
         </p:nvSpPr>
         <p:spPr>
           <a:xfrm>
-            <a:off x="3017160" y="5389920"/>
+            <a:off x="3017160" y="5463000"/>
             <a:ext cx="132120" cy="94680"/>
           </a:xfrm>
           <a:prstGeom prst="rect">
@@ -8559,7 +8516,7 @@
                 <a:latin typeface="Arial"/>
                 <a:ea typeface="Arial"/>
               </a:rPr>
-              <a:t>3.7</a:t>
+              <a:t>3.1</a:t>
             </a:r>
             <a:endParaRPr lang="en-US" sz="740" b="0" u="none" strike="noStrike">
               <a:solidFill>
@@ -8574,7 +8531,7 @@
       </p:sp>
       <p:sp>
         <p:nvSpPr>
-          <p:cNvPr id="177" name=""/>
+          <p:cNvPr id="176" name=""/>
           <p:cNvSpPr txBox="1"/>
           <p:nvPr/>
         </p:nvSpPr>
@@ -8607,7 +8564,7 @@
                 <a:latin typeface="Arial"/>
                 <a:ea typeface="Arial"/>
               </a:rPr>
-              <a:t>6.9</a:t>
+              <a:t>6.3</a:t>
             </a:r>
             <a:endParaRPr lang="en-US" sz="740" b="0" u="none" strike="noStrike">
               <a:solidFill>
@@ -8622,13 +8579,13 @@
       </p:sp>
       <p:sp>
         <p:nvSpPr>
-          <p:cNvPr id="178" name=""/>
+          <p:cNvPr id="177" name=""/>
           <p:cNvSpPr txBox="1"/>
           <p:nvPr/>
         </p:nvSpPr>
         <p:spPr>
           <a:xfrm>
-            <a:off x="4450320" y="5241600"/>
+            <a:off x="4450320" y="5116680"/>
             <a:ext cx="132120" cy="94680"/>
           </a:xfrm>
           <a:prstGeom prst="rect">
@@ -8655,7 +8612,7 @@
                 <a:latin typeface="Arial"/>
                 <a:ea typeface="Arial"/>
               </a:rPr>
-              <a:t>4.2</a:t>
+              <a:t>4.3</a:t>
             </a:r>
             <a:endParaRPr lang="en-US" sz="740" b="0" u="none" strike="noStrike">
               <a:solidFill>
@@ -8670,13 +8627,13 @@
       </p:sp>
       <p:sp>
         <p:nvSpPr>
-          <p:cNvPr id="179" name=""/>
+          <p:cNvPr id="178" name=""/>
           <p:cNvSpPr txBox="1"/>
           <p:nvPr/>
         </p:nvSpPr>
         <p:spPr>
           <a:xfrm>
-            <a:off x="2198880" y="6268320"/>
+            <a:off x="2198880" y="6252480"/>
             <a:ext cx="315360" cy="84240"/>
           </a:xfrm>
           <a:prstGeom prst="rect">
@@ -8718,13 +8675,13 @@
       </p:sp>
       <p:sp>
         <p:nvSpPr>
-          <p:cNvPr id="180" name=""/>
+          <p:cNvPr id="179" name=""/>
           <p:cNvSpPr txBox="1"/>
           <p:nvPr/>
         </p:nvSpPr>
         <p:spPr>
           <a:xfrm>
-            <a:off x="2915280" y="6268320"/>
+            <a:off x="2915280" y="6252480"/>
             <a:ext cx="315360" cy="84240"/>
           </a:xfrm>
           <a:prstGeom prst="rect">
@@ -8751,7 +8708,7 @@
                 <a:latin typeface="Arial"/>
                 <a:ea typeface="Arial"/>
               </a:rPr>
-              <a:t>P = 0.85</a:t>
+              <a:t>P = 0.64</a:t>
             </a:r>
             <a:endParaRPr lang="en-US" sz="650" b="0" u="none" strike="noStrike">
               <a:solidFill>
@@ -8766,13 +8723,13 @@
       </p:sp>
       <p:sp>
         <p:nvSpPr>
-          <p:cNvPr id="181" name=""/>
+          <p:cNvPr id="180" name=""/>
           <p:cNvSpPr txBox="1"/>
           <p:nvPr/>
         </p:nvSpPr>
         <p:spPr>
           <a:xfrm>
-            <a:off x="3632040" y="6268320"/>
+            <a:off x="3632040" y="6252480"/>
             <a:ext cx="315360" cy="84240"/>
           </a:xfrm>
           <a:prstGeom prst="rect">
@@ -8799,7 +8756,7 @@
                 <a:latin typeface="Arial"/>
                 <a:ea typeface="Arial"/>
               </a:rPr>
-              <a:t>P = 0.90</a:t>
+              <a:t>P = 0.79</a:t>
             </a:r>
             <a:endParaRPr lang="en-US" sz="650" b="0" u="none" strike="noStrike">
               <a:solidFill>
@@ -8814,7 +8771,7 @@
       </p:sp>
       <p:sp>
         <p:nvSpPr>
-          <p:cNvPr id="182" name=""/>
+          <p:cNvPr id="181" name=""/>
           <p:cNvSpPr/>
           <p:nvPr/>
         </p:nvSpPr>
@@ -8857,13 +8814,13 @@
       </p:sp>
       <p:sp>
         <p:nvSpPr>
-          <p:cNvPr id="183" name=""/>
+          <p:cNvPr id="182" name=""/>
           <p:cNvSpPr txBox="1"/>
           <p:nvPr/>
         </p:nvSpPr>
         <p:spPr>
           <a:xfrm>
-            <a:off x="4348800" y="6268320"/>
+            <a:off x="4348800" y="6252480"/>
             <a:ext cx="315360" cy="84240"/>
           </a:xfrm>
           <a:prstGeom prst="rect">
@@ -8905,7 +8862,7 @@
       </p:sp>
       <p:sp>
         <p:nvSpPr>
-          <p:cNvPr id="184" name=""/>
+          <p:cNvPr id="183" name=""/>
           <p:cNvSpPr txBox="1"/>
           <p:nvPr/>
         </p:nvSpPr>
@@ -8953,13 +8910,13 @@
       </p:sp>
       <p:sp>
         <p:nvSpPr>
-          <p:cNvPr id="185" name=""/>
+          <p:cNvPr id="184" name=""/>
           <p:cNvSpPr txBox="1"/>
           <p:nvPr/>
         </p:nvSpPr>
         <p:spPr>
           <a:xfrm>
-            <a:off x="393120" y="5891040"/>
+            <a:off x="393120" y="5838840"/>
             <a:ext cx="101160" cy="102600"/>
           </a:xfrm>
           <a:prstGeom prst="rect">
@@ -9001,13 +8958,13 @@
       </p:sp>
       <p:sp>
         <p:nvSpPr>
-          <p:cNvPr id="186" name=""/>
+          <p:cNvPr id="185" name=""/>
           <p:cNvSpPr txBox="1"/>
           <p:nvPr/>
         </p:nvSpPr>
         <p:spPr>
           <a:xfrm>
-            <a:off x="393120" y="5361120"/>
+            <a:off x="393120" y="5257080"/>
             <a:ext cx="101160" cy="102600"/>
           </a:xfrm>
           <a:prstGeom prst="rect">
@@ -9049,13 +9006,486 @@
       </p:sp>
       <p:sp>
         <p:nvSpPr>
+          <p:cNvPr id="186" name=""/>
+          <p:cNvSpPr/>
+          <p:nvPr/>
+        </p:nvSpPr>
+        <p:spPr>
+          <a:xfrm>
+            <a:off x="468720" y="6471360"/>
+            <a:ext cx="31680" cy="0"/>
+          </a:xfrm>
+          <a:prstGeom prst="line">
+            <a:avLst/>
+          </a:prstGeom>
+          <a:ln w="7920">
+            <a:solidFill>
+              <a:srgbClr val="333333"/>
+            </a:solidFill>
+            <a:round/>
+          </a:ln>
+        </p:spPr>
+        <p:style>
+          <a:lnRef idx="0"/>
+          <a:fillRef idx="0"/>
+          <a:effectRef idx="0"/>
+          <a:fontRef idx="minor"/>
+        </p:style>
+        <p:txBody>
+          <a:bodyPr lIns="3960" tIns="-3960" rIns="3960" bIns="-3960" anchor="t">
+            <a:noAutofit/>
+          </a:bodyPr>
+          <a:p>
+            <a:endParaRPr lang="en-US" sz="2400" b="0" u="none" strike="noStrike">
+              <a:solidFill>
+                <a:srgbClr val="000000"/>
+              </a:solidFill>
+              <a:effectLst/>
+              <a:uFillTx/>
+              <a:latin typeface="Times New Roman"/>
+            </a:endParaRPr>
+          </a:p>
+        </p:txBody>
+      </p:sp>
+      <p:sp>
+        <p:nvSpPr>
           <p:cNvPr id="187" name=""/>
+          <p:cNvSpPr/>
+          <p:nvPr/>
+        </p:nvSpPr>
+        <p:spPr>
+          <a:xfrm>
+            <a:off x="468720" y="5889600"/>
+            <a:ext cx="31680" cy="0"/>
+          </a:xfrm>
+          <a:prstGeom prst="line">
+            <a:avLst/>
+          </a:prstGeom>
+          <a:ln w="7920">
+            <a:solidFill>
+              <a:srgbClr val="333333"/>
+            </a:solidFill>
+            <a:round/>
+          </a:ln>
+        </p:spPr>
+        <p:style>
+          <a:lnRef idx="0"/>
+          <a:fillRef idx="0"/>
+          <a:effectRef idx="0"/>
+          <a:fontRef idx="minor"/>
+        </p:style>
+        <p:txBody>
+          <a:bodyPr lIns="3960" tIns="-3960" rIns="3960" bIns="-3960" anchor="t">
+            <a:noAutofit/>
+          </a:bodyPr>
+          <a:p>
+            <a:endParaRPr lang="en-US" sz="2400" b="0" u="none" strike="noStrike">
+              <a:solidFill>
+                <a:srgbClr val="000000"/>
+              </a:solidFill>
+              <a:effectLst/>
+              <a:uFillTx/>
+              <a:latin typeface="Times New Roman"/>
+            </a:endParaRPr>
+          </a:p>
+        </p:txBody>
+      </p:sp>
+      <p:sp>
+        <p:nvSpPr>
+          <p:cNvPr id="188" name=""/>
+          <p:cNvSpPr/>
+          <p:nvPr/>
+        </p:nvSpPr>
+        <p:spPr>
+          <a:xfrm>
+            <a:off x="468720" y="5307480"/>
+            <a:ext cx="31680" cy="0"/>
+          </a:xfrm>
+          <a:prstGeom prst="line">
+            <a:avLst/>
+          </a:prstGeom>
+          <a:ln w="7920">
+            <a:solidFill>
+              <a:srgbClr val="333333"/>
+            </a:solidFill>
+            <a:round/>
+          </a:ln>
+        </p:spPr>
+        <p:style>
+          <a:lnRef idx="0"/>
+          <a:fillRef idx="0"/>
+          <a:effectRef idx="0"/>
+          <a:fontRef idx="minor"/>
+        </p:style>
+        <p:txBody>
+          <a:bodyPr lIns="3960" tIns="-3960" rIns="3960" bIns="-3960" anchor="t">
+            <a:noAutofit/>
+          </a:bodyPr>
+          <a:p>
+            <a:endParaRPr lang="en-US" sz="2400" b="0" u="none" strike="noStrike">
+              <a:solidFill>
+                <a:srgbClr val="000000"/>
+              </a:solidFill>
+              <a:effectLst/>
+              <a:uFillTx/>
+              <a:latin typeface="Times New Roman"/>
+            </a:endParaRPr>
+          </a:p>
+        </p:txBody>
+      </p:sp>
+      <p:sp>
+        <p:nvSpPr>
+          <p:cNvPr id="189" name=""/>
+          <p:cNvSpPr/>
+          <p:nvPr/>
+        </p:nvSpPr>
+        <p:spPr>
+          <a:xfrm>
+            <a:off x="468720" y="4725720"/>
+            <a:ext cx="31680" cy="0"/>
+          </a:xfrm>
+          <a:prstGeom prst="line">
+            <a:avLst/>
+          </a:prstGeom>
+          <a:ln w="7920">
+            <a:solidFill>
+              <a:srgbClr val="333333"/>
+            </a:solidFill>
+            <a:round/>
+          </a:ln>
+        </p:spPr>
+        <p:style>
+          <a:lnRef idx="0"/>
+          <a:fillRef idx="0"/>
+          <a:effectRef idx="0"/>
+          <a:fontRef idx="minor"/>
+        </p:style>
+        <p:txBody>
+          <a:bodyPr lIns="3960" tIns="-3960" rIns="3960" bIns="-3960" anchor="t">
+            <a:noAutofit/>
+          </a:bodyPr>
+          <a:p>
+            <a:endParaRPr lang="en-US" sz="2400" b="0" u="none" strike="noStrike">
+              <a:solidFill>
+                <a:srgbClr val="000000"/>
+              </a:solidFill>
+              <a:effectLst/>
+              <a:uFillTx/>
+              <a:latin typeface="Times New Roman"/>
+            </a:endParaRPr>
+          </a:p>
+        </p:txBody>
+      </p:sp>
+      <p:sp>
+        <p:nvSpPr>
+          <p:cNvPr id="190" name=""/>
+          <p:cNvSpPr/>
+          <p:nvPr/>
+        </p:nvSpPr>
+        <p:spPr>
+          <a:xfrm>
+            <a:off x="500400" y="6471360"/>
+            <a:ext cx="4443120" cy="0"/>
+          </a:xfrm>
+          <a:prstGeom prst="line">
+            <a:avLst/>
+          </a:prstGeom>
+          <a:ln cap="sq" w="9360">
+            <a:solidFill>
+              <a:srgbClr val="333333"/>
+            </a:solidFill>
+            <a:round/>
+          </a:ln>
+        </p:spPr>
+        <p:style>
+          <a:lnRef idx="0"/>
+          <a:fillRef idx="0"/>
+          <a:effectRef idx="0"/>
+          <a:fontRef idx="minor"/>
+        </p:style>
+        <p:txBody>
+          <a:bodyPr lIns="4680" tIns="-4680" rIns="4680" bIns="-4680" anchor="t">
+            <a:noAutofit/>
+          </a:bodyPr>
+          <a:p>
+            <a:endParaRPr lang="en-US" sz="2400" b="0" u="none" strike="noStrike">
+              <a:solidFill>
+                <a:srgbClr val="000000"/>
+              </a:solidFill>
+              <a:effectLst/>
+              <a:uFillTx/>
+              <a:latin typeface="Times New Roman"/>
+            </a:endParaRPr>
+          </a:p>
+        </p:txBody>
+      </p:sp>
+      <p:sp>
+        <p:nvSpPr>
+          <p:cNvPr id="191" name=""/>
+          <p:cNvSpPr/>
+          <p:nvPr/>
+        </p:nvSpPr>
+        <p:spPr>
+          <a:xfrm flipV="1">
+            <a:off x="930600" y="6471360"/>
+            <a:ext cx="0" cy="31680"/>
+          </a:xfrm>
+          <a:prstGeom prst="line">
+            <a:avLst/>
+          </a:prstGeom>
+          <a:ln w="7920">
+            <a:solidFill>
+              <a:srgbClr val="333333"/>
+            </a:solidFill>
+            <a:round/>
+          </a:ln>
+        </p:spPr>
+        <p:style>
+          <a:lnRef idx="0"/>
+          <a:fillRef idx="0"/>
+          <a:effectRef idx="0"/>
+          <a:fontRef idx="minor"/>
+        </p:style>
+        <p:txBody>
+          <a:bodyPr lIns="3960" tIns="3960" rIns="3960" bIns="3960" anchor="t">
+            <a:noAutofit/>
+          </a:bodyPr>
+          <a:p>
+            <a:endParaRPr lang="en-US" sz="2400" b="0" u="none" strike="noStrike">
+              <a:solidFill>
+                <a:srgbClr val="000000"/>
+              </a:solidFill>
+              <a:effectLst/>
+              <a:uFillTx/>
+              <a:latin typeface="Times New Roman"/>
+            </a:endParaRPr>
+          </a:p>
+        </p:txBody>
+      </p:sp>
+      <p:sp>
+        <p:nvSpPr>
+          <p:cNvPr id="192" name=""/>
+          <p:cNvSpPr/>
+          <p:nvPr/>
+        </p:nvSpPr>
+        <p:spPr>
+          <a:xfrm flipV="1">
+            <a:off x="1647000" y="6471360"/>
+            <a:ext cx="0" cy="31680"/>
+          </a:xfrm>
+          <a:prstGeom prst="line">
+            <a:avLst/>
+          </a:prstGeom>
+          <a:ln w="7920">
+            <a:solidFill>
+              <a:srgbClr val="333333"/>
+            </a:solidFill>
+            <a:round/>
+          </a:ln>
+        </p:spPr>
+        <p:style>
+          <a:lnRef idx="0"/>
+          <a:fillRef idx="0"/>
+          <a:effectRef idx="0"/>
+          <a:fontRef idx="minor"/>
+        </p:style>
+        <p:txBody>
+          <a:bodyPr lIns="3960" tIns="3960" rIns="3960" bIns="3960" anchor="t">
+            <a:noAutofit/>
+          </a:bodyPr>
+          <a:p>
+            <a:endParaRPr lang="en-US" sz="2400" b="0" u="none" strike="noStrike">
+              <a:solidFill>
+                <a:srgbClr val="000000"/>
+              </a:solidFill>
+              <a:effectLst/>
+              <a:uFillTx/>
+              <a:latin typeface="Times New Roman"/>
+            </a:endParaRPr>
+          </a:p>
+        </p:txBody>
+      </p:sp>
+      <p:sp>
+        <p:nvSpPr>
+          <p:cNvPr id="193" name=""/>
+          <p:cNvSpPr/>
+          <p:nvPr/>
+        </p:nvSpPr>
+        <p:spPr>
+          <a:xfrm flipV="1">
+            <a:off x="2363760" y="6471360"/>
+            <a:ext cx="0" cy="31680"/>
+          </a:xfrm>
+          <a:prstGeom prst="line">
+            <a:avLst/>
+          </a:prstGeom>
+          <a:ln w="7920">
+            <a:solidFill>
+              <a:srgbClr val="333333"/>
+            </a:solidFill>
+            <a:round/>
+          </a:ln>
+        </p:spPr>
+        <p:style>
+          <a:lnRef idx="0"/>
+          <a:fillRef idx="0"/>
+          <a:effectRef idx="0"/>
+          <a:fontRef idx="minor"/>
+        </p:style>
+        <p:txBody>
+          <a:bodyPr lIns="3960" tIns="3960" rIns="3960" bIns="3960" anchor="t">
+            <a:noAutofit/>
+          </a:bodyPr>
+          <a:p>
+            <a:endParaRPr lang="en-US" sz="2400" b="0" u="none" strike="noStrike">
+              <a:solidFill>
+                <a:srgbClr val="000000"/>
+              </a:solidFill>
+              <a:effectLst/>
+              <a:uFillTx/>
+              <a:latin typeface="Times New Roman"/>
+            </a:endParaRPr>
+          </a:p>
+        </p:txBody>
+      </p:sp>
+      <p:sp>
+        <p:nvSpPr>
+          <p:cNvPr id="194" name=""/>
+          <p:cNvSpPr/>
+          <p:nvPr/>
+        </p:nvSpPr>
+        <p:spPr>
+          <a:xfrm flipV="1">
+            <a:off x="3080520" y="6471360"/>
+            <a:ext cx="0" cy="31680"/>
+          </a:xfrm>
+          <a:prstGeom prst="line">
+            <a:avLst/>
+          </a:prstGeom>
+          <a:ln w="7920">
+            <a:solidFill>
+              <a:srgbClr val="333333"/>
+            </a:solidFill>
+            <a:round/>
+          </a:ln>
+        </p:spPr>
+        <p:style>
+          <a:lnRef idx="0"/>
+          <a:fillRef idx="0"/>
+          <a:effectRef idx="0"/>
+          <a:fontRef idx="minor"/>
+        </p:style>
+        <p:txBody>
+          <a:bodyPr lIns="3960" tIns="3960" rIns="3960" bIns="3960" anchor="t">
+            <a:noAutofit/>
+          </a:bodyPr>
+          <a:p>
+            <a:endParaRPr lang="en-US" sz="2400" b="0" u="none" strike="noStrike">
+              <a:solidFill>
+                <a:srgbClr val="000000"/>
+              </a:solidFill>
+              <a:effectLst/>
+              <a:uFillTx/>
+              <a:latin typeface="Times New Roman"/>
+            </a:endParaRPr>
+          </a:p>
+        </p:txBody>
+      </p:sp>
+      <p:sp>
+        <p:nvSpPr>
+          <p:cNvPr id="195" name=""/>
+          <p:cNvSpPr/>
+          <p:nvPr/>
+        </p:nvSpPr>
+        <p:spPr>
+          <a:xfrm flipV="1">
+            <a:off x="3796920" y="6471360"/>
+            <a:ext cx="0" cy="31680"/>
+          </a:xfrm>
+          <a:prstGeom prst="line">
+            <a:avLst/>
+          </a:prstGeom>
+          <a:ln w="7920">
+            <a:solidFill>
+              <a:srgbClr val="333333"/>
+            </a:solidFill>
+            <a:round/>
+          </a:ln>
+        </p:spPr>
+        <p:style>
+          <a:lnRef idx="0"/>
+          <a:fillRef idx="0"/>
+          <a:effectRef idx="0"/>
+          <a:fontRef idx="minor"/>
+        </p:style>
+        <p:txBody>
+          <a:bodyPr lIns="3960" tIns="3960" rIns="3960" bIns="3960" anchor="t">
+            <a:noAutofit/>
+          </a:bodyPr>
+          <a:p>
+            <a:endParaRPr lang="en-US" sz="2400" b="0" u="none" strike="noStrike">
+              <a:solidFill>
+                <a:srgbClr val="000000"/>
+              </a:solidFill>
+              <a:effectLst/>
+              <a:uFillTx/>
+              <a:latin typeface="Times New Roman"/>
+            </a:endParaRPr>
+          </a:p>
+        </p:txBody>
+      </p:sp>
+      <p:sp>
+        <p:nvSpPr>
+          <p:cNvPr id="196" name=""/>
+          <p:cNvSpPr/>
+          <p:nvPr/>
+        </p:nvSpPr>
+        <p:spPr>
+          <a:xfrm flipV="1">
+            <a:off x="4513680" y="6471360"/>
+            <a:ext cx="0" cy="31680"/>
+          </a:xfrm>
+          <a:prstGeom prst="line">
+            <a:avLst/>
+          </a:prstGeom>
+          <a:ln w="7920">
+            <a:solidFill>
+              <a:srgbClr val="333333"/>
+            </a:solidFill>
+            <a:round/>
+          </a:ln>
+        </p:spPr>
+        <p:style>
+          <a:lnRef idx="0"/>
+          <a:fillRef idx="0"/>
+          <a:effectRef idx="0"/>
+          <a:fontRef idx="minor"/>
+        </p:style>
+        <p:txBody>
+          <a:bodyPr lIns="3960" tIns="3960" rIns="3960" bIns="3960" anchor="t">
+            <a:noAutofit/>
+          </a:bodyPr>
+          <a:p>
+            <a:endParaRPr lang="en-US" sz="2400" b="0" u="none" strike="noStrike">
+              <a:solidFill>
+                <a:srgbClr val="000000"/>
+              </a:solidFill>
+              <a:effectLst/>
+              <a:uFillTx/>
+              <a:latin typeface="Times New Roman"/>
+            </a:endParaRPr>
+          </a:p>
+        </p:txBody>
+      </p:sp>
+      <p:sp>
+        <p:nvSpPr>
+          <p:cNvPr id="197" name=""/>
           <p:cNvSpPr txBox="1"/>
           <p:nvPr/>
         </p:nvSpPr>
         <p:spPr>
           <a:xfrm>
-            <a:off x="393120" y="4831200"/>
+            <a:off x="393120" y="4675320"/>
             <a:ext cx="101160" cy="102600"/>
           </a:xfrm>
           <a:prstGeom prst="rect">
@@ -9097,571 +9527,7 @@
       </p:sp>
       <p:sp>
         <p:nvSpPr>
-          <p:cNvPr id="188" name=""/>
-          <p:cNvSpPr/>
-          <p:nvPr/>
-        </p:nvSpPr>
-        <p:spPr>
-          <a:xfrm>
-            <a:off x="468720" y="6471360"/>
-            <a:ext cx="31680" cy="0"/>
-          </a:xfrm>
-          <a:prstGeom prst="line">
-            <a:avLst/>
-          </a:prstGeom>
-          <a:ln w="7920">
-            <a:solidFill>
-              <a:srgbClr val="333333"/>
-            </a:solidFill>
-            <a:round/>
-          </a:ln>
-        </p:spPr>
-        <p:style>
-          <a:lnRef idx="0"/>
-          <a:fillRef idx="0"/>
-          <a:effectRef idx="0"/>
-          <a:fontRef idx="minor"/>
-        </p:style>
-        <p:txBody>
-          <a:bodyPr lIns="3960" tIns="-3960" rIns="3960" bIns="-3960" anchor="t">
-            <a:noAutofit/>
-          </a:bodyPr>
-          <a:p>
-            <a:endParaRPr lang="en-US" sz="2400" b="0" u="none" strike="noStrike">
-              <a:solidFill>
-                <a:srgbClr val="000000"/>
-              </a:solidFill>
-              <a:effectLst/>
-              <a:uFillTx/>
-              <a:latin typeface="Times New Roman"/>
-            </a:endParaRPr>
-          </a:p>
-        </p:txBody>
-      </p:sp>
-      <p:sp>
-        <p:nvSpPr>
-          <p:cNvPr id="189" name=""/>
-          <p:cNvSpPr/>
-          <p:nvPr/>
-        </p:nvSpPr>
-        <p:spPr>
-          <a:xfrm>
-            <a:off x="468720" y="5941440"/>
-            <a:ext cx="31680" cy="0"/>
-          </a:xfrm>
-          <a:prstGeom prst="line">
-            <a:avLst/>
-          </a:prstGeom>
-          <a:ln w="7920">
-            <a:solidFill>
-              <a:srgbClr val="333333"/>
-            </a:solidFill>
-            <a:round/>
-          </a:ln>
-        </p:spPr>
-        <p:style>
-          <a:lnRef idx="0"/>
-          <a:fillRef idx="0"/>
-          <a:effectRef idx="0"/>
-          <a:fontRef idx="minor"/>
-        </p:style>
-        <p:txBody>
-          <a:bodyPr lIns="3960" tIns="-3960" rIns="3960" bIns="-3960" anchor="t">
-            <a:noAutofit/>
-          </a:bodyPr>
-          <a:p>
-            <a:endParaRPr lang="en-US" sz="2400" b="0" u="none" strike="noStrike">
-              <a:solidFill>
-                <a:srgbClr val="000000"/>
-              </a:solidFill>
-              <a:effectLst/>
-              <a:uFillTx/>
-              <a:latin typeface="Times New Roman"/>
-            </a:endParaRPr>
-          </a:p>
-        </p:txBody>
-      </p:sp>
-      <p:sp>
-        <p:nvSpPr>
-          <p:cNvPr id="190" name=""/>
-          <p:cNvSpPr/>
-          <p:nvPr/>
-        </p:nvSpPr>
-        <p:spPr>
-          <a:xfrm>
-            <a:off x="468720" y="5411880"/>
-            <a:ext cx="31680" cy="0"/>
-          </a:xfrm>
-          <a:prstGeom prst="line">
-            <a:avLst/>
-          </a:prstGeom>
-          <a:ln w="7920">
-            <a:solidFill>
-              <a:srgbClr val="333333"/>
-            </a:solidFill>
-            <a:round/>
-          </a:ln>
-        </p:spPr>
-        <p:style>
-          <a:lnRef idx="0"/>
-          <a:fillRef idx="0"/>
-          <a:effectRef idx="0"/>
-          <a:fontRef idx="minor"/>
-        </p:style>
-        <p:txBody>
-          <a:bodyPr lIns="3960" tIns="-3960" rIns="3960" bIns="-3960" anchor="t">
-            <a:noAutofit/>
-          </a:bodyPr>
-          <a:p>
-            <a:endParaRPr lang="en-US" sz="2400" b="0" u="none" strike="noStrike">
-              <a:solidFill>
-                <a:srgbClr val="000000"/>
-              </a:solidFill>
-              <a:effectLst/>
-              <a:uFillTx/>
-              <a:latin typeface="Times New Roman"/>
-            </a:endParaRPr>
-          </a:p>
-        </p:txBody>
-      </p:sp>
-      <p:sp>
-        <p:nvSpPr>
-          <p:cNvPr id="191" name=""/>
-          <p:cNvSpPr/>
-          <p:nvPr/>
-        </p:nvSpPr>
-        <p:spPr>
-          <a:xfrm>
-            <a:off x="468720" y="4881960"/>
-            <a:ext cx="31680" cy="0"/>
-          </a:xfrm>
-          <a:prstGeom prst="line">
-            <a:avLst/>
-          </a:prstGeom>
-          <a:ln w="7920">
-            <a:solidFill>
-              <a:srgbClr val="333333"/>
-            </a:solidFill>
-            <a:round/>
-          </a:ln>
-        </p:spPr>
-        <p:style>
-          <a:lnRef idx="0"/>
-          <a:fillRef idx="0"/>
-          <a:effectRef idx="0"/>
-          <a:fontRef idx="minor"/>
-        </p:style>
-        <p:txBody>
-          <a:bodyPr lIns="3960" tIns="-3960" rIns="3960" bIns="-3960" anchor="t">
-            <a:noAutofit/>
-          </a:bodyPr>
-          <a:p>
-            <a:endParaRPr lang="en-US" sz="2400" b="0" u="none" strike="noStrike">
-              <a:solidFill>
-                <a:srgbClr val="000000"/>
-              </a:solidFill>
-              <a:effectLst/>
-              <a:uFillTx/>
-              <a:latin typeface="Times New Roman"/>
-            </a:endParaRPr>
-          </a:p>
-        </p:txBody>
-      </p:sp>
-      <p:sp>
-        <p:nvSpPr>
-          <p:cNvPr id="192" name=""/>
-          <p:cNvSpPr/>
-          <p:nvPr/>
-        </p:nvSpPr>
-        <p:spPr>
-          <a:xfrm>
-            <a:off x="468720" y="4352040"/>
-            <a:ext cx="31680" cy="0"/>
-          </a:xfrm>
-          <a:prstGeom prst="line">
-            <a:avLst/>
-          </a:prstGeom>
-          <a:ln w="7920">
-            <a:solidFill>
-              <a:srgbClr val="333333"/>
-            </a:solidFill>
-            <a:round/>
-          </a:ln>
-        </p:spPr>
-        <p:style>
-          <a:lnRef idx="0"/>
-          <a:fillRef idx="0"/>
-          <a:effectRef idx="0"/>
-          <a:fontRef idx="minor"/>
-        </p:style>
-        <p:txBody>
-          <a:bodyPr lIns="3960" tIns="-3960" rIns="3960" bIns="-3960" anchor="t">
-            <a:noAutofit/>
-          </a:bodyPr>
-          <a:p>
-            <a:endParaRPr lang="en-US" sz="2400" b="0" u="none" strike="noStrike">
-              <a:solidFill>
-                <a:srgbClr val="000000"/>
-              </a:solidFill>
-              <a:effectLst/>
-              <a:uFillTx/>
-              <a:latin typeface="Times New Roman"/>
-            </a:endParaRPr>
-          </a:p>
-        </p:txBody>
-      </p:sp>
-      <p:sp>
-        <p:nvSpPr>
-          <p:cNvPr id="193" name=""/>
-          <p:cNvSpPr/>
-          <p:nvPr/>
-        </p:nvSpPr>
-        <p:spPr>
-          <a:xfrm>
-            <a:off x="500400" y="6471360"/>
-            <a:ext cx="4443120" cy="0"/>
-          </a:xfrm>
-          <a:prstGeom prst="line">
-            <a:avLst/>
-          </a:prstGeom>
-          <a:ln cap="sq" w="9360">
-            <a:solidFill>
-              <a:srgbClr val="333333"/>
-            </a:solidFill>
-            <a:round/>
-          </a:ln>
-        </p:spPr>
-        <p:style>
-          <a:lnRef idx="0"/>
-          <a:fillRef idx="0"/>
-          <a:effectRef idx="0"/>
-          <a:fontRef idx="minor"/>
-        </p:style>
-        <p:txBody>
-          <a:bodyPr lIns="4680" tIns="-4680" rIns="4680" bIns="-4680" anchor="t">
-            <a:noAutofit/>
-          </a:bodyPr>
-          <a:p>
-            <a:endParaRPr lang="en-US" sz="2400" b="0" u="none" strike="noStrike">
-              <a:solidFill>
-                <a:srgbClr val="000000"/>
-              </a:solidFill>
-              <a:effectLst/>
-              <a:uFillTx/>
-              <a:latin typeface="Times New Roman"/>
-            </a:endParaRPr>
-          </a:p>
-        </p:txBody>
-      </p:sp>
-      <p:sp>
-        <p:nvSpPr>
-          <p:cNvPr id="194" name=""/>
-          <p:cNvSpPr/>
-          <p:nvPr/>
-        </p:nvSpPr>
-        <p:spPr>
-          <a:xfrm flipV="1">
-            <a:off x="930600" y="6471360"/>
-            <a:ext cx="0" cy="31680"/>
-          </a:xfrm>
-          <a:prstGeom prst="line">
-            <a:avLst/>
-          </a:prstGeom>
-          <a:ln w="7920">
-            <a:solidFill>
-              <a:srgbClr val="333333"/>
-            </a:solidFill>
-            <a:round/>
-          </a:ln>
-        </p:spPr>
-        <p:style>
-          <a:lnRef idx="0"/>
-          <a:fillRef idx="0"/>
-          <a:effectRef idx="0"/>
-          <a:fontRef idx="minor"/>
-        </p:style>
-        <p:txBody>
-          <a:bodyPr lIns="3960" tIns="3960" rIns="3960" bIns="3960" anchor="t">
-            <a:noAutofit/>
-          </a:bodyPr>
-          <a:p>
-            <a:endParaRPr lang="en-US" sz="2400" b="0" u="none" strike="noStrike">
-              <a:solidFill>
-                <a:srgbClr val="000000"/>
-              </a:solidFill>
-              <a:effectLst/>
-              <a:uFillTx/>
-              <a:latin typeface="Times New Roman"/>
-            </a:endParaRPr>
-          </a:p>
-        </p:txBody>
-      </p:sp>
-      <p:sp>
-        <p:nvSpPr>
-          <p:cNvPr id="195" name=""/>
-          <p:cNvSpPr/>
-          <p:nvPr/>
-        </p:nvSpPr>
-        <p:spPr>
-          <a:xfrm flipV="1">
-            <a:off x="1647000" y="6471360"/>
-            <a:ext cx="0" cy="31680"/>
-          </a:xfrm>
-          <a:prstGeom prst="line">
-            <a:avLst/>
-          </a:prstGeom>
-          <a:ln w="7920">
-            <a:solidFill>
-              <a:srgbClr val="333333"/>
-            </a:solidFill>
-            <a:round/>
-          </a:ln>
-        </p:spPr>
-        <p:style>
-          <a:lnRef idx="0"/>
-          <a:fillRef idx="0"/>
-          <a:effectRef idx="0"/>
-          <a:fontRef idx="minor"/>
-        </p:style>
-        <p:txBody>
-          <a:bodyPr lIns="3960" tIns="3960" rIns="3960" bIns="3960" anchor="t">
-            <a:noAutofit/>
-          </a:bodyPr>
-          <a:p>
-            <a:endParaRPr lang="en-US" sz="2400" b="0" u="none" strike="noStrike">
-              <a:solidFill>
-                <a:srgbClr val="000000"/>
-              </a:solidFill>
-              <a:effectLst/>
-              <a:uFillTx/>
-              <a:latin typeface="Times New Roman"/>
-            </a:endParaRPr>
-          </a:p>
-        </p:txBody>
-      </p:sp>
-      <p:sp>
-        <p:nvSpPr>
-          <p:cNvPr id="196" name=""/>
-          <p:cNvSpPr/>
-          <p:nvPr/>
-        </p:nvSpPr>
-        <p:spPr>
-          <a:xfrm flipV="1">
-            <a:off x="2363760" y="6471360"/>
-            <a:ext cx="0" cy="31680"/>
-          </a:xfrm>
-          <a:prstGeom prst="line">
-            <a:avLst/>
-          </a:prstGeom>
-          <a:ln w="7920">
-            <a:solidFill>
-              <a:srgbClr val="333333"/>
-            </a:solidFill>
-            <a:round/>
-          </a:ln>
-        </p:spPr>
-        <p:style>
-          <a:lnRef idx="0"/>
-          <a:fillRef idx="0"/>
-          <a:effectRef idx="0"/>
-          <a:fontRef idx="minor"/>
-        </p:style>
-        <p:txBody>
-          <a:bodyPr lIns="3960" tIns="3960" rIns="3960" bIns="3960" anchor="t">
-            <a:noAutofit/>
-          </a:bodyPr>
-          <a:p>
-            <a:endParaRPr lang="en-US" sz="2400" b="0" u="none" strike="noStrike">
-              <a:solidFill>
-                <a:srgbClr val="000000"/>
-              </a:solidFill>
-              <a:effectLst/>
-              <a:uFillTx/>
-              <a:latin typeface="Times New Roman"/>
-            </a:endParaRPr>
-          </a:p>
-        </p:txBody>
-      </p:sp>
-      <p:sp>
-        <p:nvSpPr>
-          <p:cNvPr id="197" name=""/>
-          <p:cNvSpPr/>
-          <p:nvPr/>
-        </p:nvSpPr>
-        <p:spPr>
-          <a:xfrm flipV="1">
-            <a:off x="3080520" y="6471360"/>
-            <a:ext cx="0" cy="31680"/>
-          </a:xfrm>
-          <a:prstGeom prst="line">
-            <a:avLst/>
-          </a:prstGeom>
-          <a:ln w="7920">
-            <a:solidFill>
-              <a:srgbClr val="333333"/>
-            </a:solidFill>
-            <a:round/>
-          </a:ln>
-        </p:spPr>
-        <p:style>
-          <a:lnRef idx="0"/>
-          <a:fillRef idx="0"/>
-          <a:effectRef idx="0"/>
-          <a:fontRef idx="minor"/>
-        </p:style>
-        <p:txBody>
-          <a:bodyPr lIns="3960" tIns="3960" rIns="3960" bIns="3960" anchor="t">
-            <a:noAutofit/>
-          </a:bodyPr>
-          <a:p>
-            <a:endParaRPr lang="en-US" sz="2400" b="0" u="none" strike="noStrike">
-              <a:solidFill>
-                <a:srgbClr val="000000"/>
-              </a:solidFill>
-              <a:effectLst/>
-              <a:uFillTx/>
-              <a:latin typeface="Times New Roman"/>
-            </a:endParaRPr>
-          </a:p>
-        </p:txBody>
-      </p:sp>
-      <p:sp>
-        <p:nvSpPr>
           <p:cNvPr id="198" name=""/>
-          <p:cNvSpPr/>
-          <p:nvPr/>
-        </p:nvSpPr>
-        <p:spPr>
-          <a:xfrm flipV="1">
-            <a:off x="3796920" y="6471360"/>
-            <a:ext cx="0" cy="31680"/>
-          </a:xfrm>
-          <a:prstGeom prst="line">
-            <a:avLst/>
-          </a:prstGeom>
-          <a:ln w="7920">
-            <a:solidFill>
-              <a:srgbClr val="333333"/>
-            </a:solidFill>
-            <a:round/>
-          </a:ln>
-        </p:spPr>
-        <p:style>
-          <a:lnRef idx="0"/>
-          <a:fillRef idx="0"/>
-          <a:effectRef idx="0"/>
-          <a:fontRef idx="minor"/>
-        </p:style>
-        <p:txBody>
-          <a:bodyPr lIns="3960" tIns="3960" rIns="3960" bIns="3960" anchor="t">
-            <a:noAutofit/>
-          </a:bodyPr>
-          <a:p>
-            <a:endParaRPr lang="en-US" sz="2400" b="0" u="none" strike="noStrike">
-              <a:solidFill>
-                <a:srgbClr val="000000"/>
-              </a:solidFill>
-              <a:effectLst/>
-              <a:uFillTx/>
-              <a:latin typeface="Times New Roman"/>
-            </a:endParaRPr>
-          </a:p>
-        </p:txBody>
-      </p:sp>
-      <p:sp>
-        <p:nvSpPr>
-          <p:cNvPr id="199" name=""/>
-          <p:cNvSpPr/>
-          <p:nvPr/>
-        </p:nvSpPr>
-        <p:spPr>
-          <a:xfrm flipV="1">
-            <a:off x="4513680" y="6471360"/>
-            <a:ext cx="0" cy="31680"/>
-          </a:xfrm>
-          <a:prstGeom prst="line">
-            <a:avLst/>
-          </a:prstGeom>
-          <a:ln w="7920">
-            <a:solidFill>
-              <a:srgbClr val="333333"/>
-            </a:solidFill>
-            <a:round/>
-          </a:ln>
-        </p:spPr>
-        <p:style>
-          <a:lnRef idx="0"/>
-          <a:fillRef idx="0"/>
-          <a:effectRef idx="0"/>
-          <a:fontRef idx="minor"/>
-        </p:style>
-        <p:txBody>
-          <a:bodyPr lIns="3960" tIns="3960" rIns="3960" bIns="3960" anchor="t">
-            <a:noAutofit/>
-          </a:bodyPr>
-          <a:p>
-            <a:endParaRPr lang="en-US" sz="2400" b="0" u="none" strike="noStrike">
-              <a:solidFill>
-                <a:srgbClr val="000000"/>
-              </a:solidFill>
-              <a:effectLst/>
-              <a:uFillTx/>
-              <a:latin typeface="Times New Roman"/>
-            </a:endParaRPr>
-          </a:p>
-        </p:txBody>
-      </p:sp>
-      <p:sp>
-        <p:nvSpPr>
-          <p:cNvPr id="200" name=""/>
-          <p:cNvSpPr txBox="1"/>
-          <p:nvPr/>
-        </p:nvSpPr>
-        <p:spPr>
-          <a:xfrm>
-            <a:off x="393120" y="4301640"/>
-            <a:ext cx="101160" cy="102600"/>
-          </a:xfrm>
-          <a:prstGeom prst="rect">
-            <a:avLst/>
-          </a:prstGeom>
-          <a:noFill/>
-          <a:ln w="0">
-            <a:noFill/>
-          </a:ln>
-        </p:spPr>
-        <p:txBody>
-          <a:bodyPr wrap="none" lIns="0" tIns="0" rIns="0" bIns="0" anchor="t">
-            <a:spAutoFit/>
-          </a:bodyPr>
-          <a:p>
-            <a:pPr/>
-            <a:r>
-              <a:rPr lang="en-US" sz="800" b="0" u="none" strike="noStrike">
-                <a:solidFill>
-                  <a:srgbClr val="262626"/>
-                </a:solidFill>
-                <a:effectLst/>
-                <a:uFillTx/>
-                <a:latin typeface="Arial"/>
-                <a:ea typeface="Arial"/>
-              </a:rPr>
-              <a:t>8</a:t>
-            </a:r>
-            <a:endParaRPr lang="en-US" sz="800" b="0" u="none" strike="noStrike">
-              <a:solidFill>
-                <a:srgbClr val="000000"/>
-              </a:solidFill>
-              <a:effectLst/>
-              <a:uFillTx/>
-              <a:latin typeface="Times New Roman"/>
-            </a:endParaRPr>
-          </a:p>
-        </p:txBody>
-      </p:sp>
-      <p:sp>
-        <p:nvSpPr>
-          <p:cNvPr id="201" name=""/>
           <p:cNvSpPr txBox="1"/>
           <p:nvPr/>
         </p:nvSpPr>
@@ -9709,7 +9575,7 @@
       </p:sp>
       <p:sp>
         <p:nvSpPr>
-          <p:cNvPr id="202" name=""/>
+          <p:cNvPr id="199" name=""/>
           <p:cNvSpPr txBox="1"/>
           <p:nvPr/>
         </p:nvSpPr>
@@ -9757,7 +9623,7 @@
       </p:sp>
       <p:sp>
         <p:nvSpPr>
-          <p:cNvPr id="203" name=""/>
+          <p:cNvPr id="200" name=""/>
           <p:cNvSpPr txBox="1"/>
           <p:nvPr/>
         </p:nvSpPr>
@@ -9805,7 +9671,7 @@
       </p:sp>
       <p:sp>
         <p:nvSpPr>
-          <p:cNvPr id="204" name=""/>
+          <p:cNvPr id="201" name=""/>
           <p:cNvSpPr txBox="1"/>
           <p:nvPr/>
         </p:nvSpPr>
@@ -9853,7 +9719,7 @@
       </p:sp>
       <p:sp>
         <p:nvSpPr>
-          <p:cNvPr id="205" name=""/>
+          <p:cNvPr id="202" name=""/>
           <p:cNvSpPr txBox="1"/>
           <p:nvPr/>
         </p:nvSpPr>
@@ -9901,7 +9767,7 @@
       </p:sp>
       <p:sp>
         <p:nvSpPr>
-          <p:cNvPr id="206" name=""/>
+          <p:cNvPr id="203" name=""/>
           <p:cNvSpPr txBox="1"/>
           <p:nvPr/>
         </p:nvSpPr>
@@ -9949,7 +9815,7 @@
       </p:sp>
       <p:sp>
         <p:nvSpPr>
-          <p:cNvPr id="207" name=""/>
+          <p:cNvPr id="204" name=""/>
           <p:cNvSpPr txBox="1"/>
           <p:nvPr/>
         </p:nvSpPr>
@@ -9997,7 +9863,7 @@
       </p:sp>
       <p:sp>
         <p:nvSpPr>
-          <p:cNvPr id="208" name=""/>
+          <p:cNvPr id="205" name=""/>
           <p:cNvSpPr txBox="1"/>
           <p:nvPr/>
         </p:nvSpPr>
@@ -10045,7 +9911,7 @@
       </p:sp>
       <p:sp>
         <p:nvSpPr>
-          <p:cNvPr id="209" name=""/>
+          <p:cNvPr id="206" name=""/>
           <p:cNvSpPr txBox="1"/>
           <p:nvPr/>
         </p:nvSpPr>
@@ -10093,7 +9959,7 @@
       </p:sp>
       <p:sp>
         <p:nvSpPr>
-          <p:cNvPr id="210" name=""/>
+          <p:cNvPr id="207" name=""/>
           <p:cNvSpPr txBox="1"/>
           <p:nvPr/>
         </p:nvSpPr>
@@ -10141,7 +10007,7 @@
       </p:sp>
       <p:sp>
         <p:nvSpPr>
-          <p:cNvPr id="211" name=""/>
+          <p:cNvPr id="208" name=""/>
           <p:cNvSpPr/>
           <p:nvPr/>
         </p:nvSpPr>
@@ -10201,13 +10067,13 @@
       </p:sp>
       <p:sp>
         <p:nvSpPr>
-          <p:cNvPr id="212" name=""/>
+          <p:cNvPr id="209" name=""/>
           <p:cNvSpPr/>
           <p:nvPr/>
         </p:nvSpPr>
         <p:spPr>
           <a:xfrm flipV="1">
-            <a:off x="8271360" y="4368600"/>
+            <a:off x="8372160" y="4368600"/>
             <a:ext cx="0" cy="2102760"/>
           </a:xfrm>
           <a:prstGeom prst="line">
@@ -10247,14 +10113,14 @@
       </p:sp>
       <p:sp>
         <p:nvSpPr>
-          <p:cNvPr id="213" name=""/>
-          <p:cNvSpPr/>
-          <p:nvPr/>
-        </p:nvSpPr>
-        <p:spPr>
-          <a:xfrm>
-            <a:off x="6920280" y="6072120"/>
-            <a:ext cx="2206080" cy="0"/>
+          <p:cNvPr id="210" name=""/>
+          <p:cNvSpPr/>
+          <p:nvPr/>
+        </p:nvSpPr>
+        <p:spPr>
+          <a:xfrm>
+            <a:off x="6955560" y="6072120"/>
+            <a:ext cx="2302200" cy="0"/>
           </a:xfrm>
           <a:prstGeom prst="line">
             <a:avLst/>
@@ -10290,14 +10156,14 @@
       </p:sp>
       <p:sp>
         <p:nvSpPr>
-          <p:cNvPr id="214" name=""/>
-          <p:cNvSpPr/>
-          <p:nvPr/>
-        </p:nvSpPr>
-        <p:spPr>
-          <a:xfrm>
-            <a:off x="7410240" y="5406480"/>
-            <a:ext cx="2630880" cy="0"/>
+          <p:cNvPr id="211" name=""/>
+          <p:cNvSpPr/>
+          <p:nvPr/>
+        </p:nvSpPr>
+        <p:spPr>
+          <a:xfrm>
+            <a:off x="7351200" y="5406480"/>
+            <a:ext cx="2689920" cy="0"/>
           </a:xfrm>
           <a:prstGeom prst="line">
             <a:avLst/>
@@ -10333,14 +10199,14 @@
       </p:sp>
       <p:sp>
         <p:nvSpPr>
-          <p:cNvPr id="215" name=""/>
+          <p:cNvPr id="212" name=""/>
           <p:cNvSpPr/>
           <p:nvPr/>
         </p:nvSpPr>
         <p:spPr>
           <a:xfrm>
             <a:off x="6001920" y="4741200"/>
-            <a:ext cx="1677960" cy="0"/>
+            <a:ext cx="1749600" cy="0"/>
           </a:xfrm>
           <a:prstGeom prst="line">
             <a:avLst/>
@@ -10376,13 +10242,13 @@
       </p:sp>
       <p:sp>
         <p:nvSpPr>
-          <p:cNvPr id="216" name=""/>
-          <p:cNvSpPr/>
-          <p:nvPr/>
-        </p:nvSpPr>
-        <p:spPr>
-          <a:xfrm>
-            <a:off x="7882920" y="6036840"/>
+          <p:cNvPr id="213" name=""/>
+          <p:cNvSpPr/>
+          <p:nvPr/>
+        </p:nvSpPr>
+        <p:spPr>
+          <a:xfrm>
+            <a:off x="7961760" y="6036840"/>
             <a:ext cx="70920" cy="70920"/>
           </a:xfrm>
           <a:custGeom>
@@ -10433,13 +10299,13 @@
       </p:sp>
       <p:sp>
         <p:nvSpPr>
-          <p:cNvPr id="217" name=""/>
-          <p:cNvSpPr/>
-          <p:nvPr/>
-        </p:nvSpPr>
-        <p:spPr>
-          <a:xfrm>
-            <a:off x="8556840" y="5371200"/>
+          <p:cNvPr id="214" name=""/>
+          <p:cNvSpPr/>
+          <p:nvPr/>
+        </p:nvSpPr>
+        <p:spPr>
+          <a:xfrm>
+            <a:off x="8524080" y="5371200"/>
             <a:ext cx="70920" cy="70920"/>
           </a:xfrm>
           <a:custGeom>
@@ -10490,13 +10356,13 @@
       </p:sp>
       <p:sp>
         <p:nvSpPr>
-          <p:cNvPr id="218" name=""/>
-          <p:cNvSpPr/>
-          <p:nvPr/>
-        </p:nvSpPr>
-        <p:spPr>
-          <a:xfrm>
-            <a:off x="6729480" y="4705920"/>
+          <p:cNvPr id="215" name=""/>
+          <p:cNvSpPr/>
+          <p:nvPr/>
+        </p:nvSpPr>
+        <p:spPr>
+          <a:xfrm>
+            <a:off x="6762240" y="4705920"/>
             <a:ext cx="70920" cy="70920"/>
           </a:xfrm>
           <a:custGeom>
@@ -10548,7 +10414,7 @@
       </p:sp>
       <p:sp>
         <p:nvSpPr>
-          <p:cNvPr id="219" name=""/>
+          <p:cNvPr id="216" name=""/>
           <p:cNvSpPr txBox="1"/>
           <p:nvPr/>
         </p:nvSpPr>
@@ -10596,13 +10462,13 @@
       </p:sp>
       <p:sp>
         <p:nvSpPr>
-          <p:cNvPr id="220" name=""/>
+          <p:cNvPr id="217" name=""/>
           <p:cNvSpPr txBox="1"/>
           <p:nvPr/>
         </p:nvSpPr>
         <p:spPr>
           <a:xfrm>
-            <a:off x="7601040" y="5932440"/>
+            <a:off x="7679520" y="5932440"/>
             <a:ext cx="626040" cy="87120"/>
           </a:xfrm>
           <a:prstGeom prst="rect">
@@ -10629,7 +10495,7 @@
                 <a:latin typeface="Arial"/>
                 <a:ea typeface="Arial"/>
               </a:rPr>
-              <a:t>0.94 (P = 0.540)</a:t>
+              <a:t>0.94 (P = 0.533)</a:t>
             </a:r>
             <a:endParaRPr lang="en-US" sz="690" b="0" u="none" strike="noStrike">
               <a:solidFill>
@@ -10644,13 +10510,13 @@
       </p:sp>
       <p:sp>
         <p:nvSpPr>
-          <p:cNvPr id="221" name=""/>
+          <p:cNvPr id="218" name=""/>
           <p:cNvSpPr txBox="1"/>
           <p:nvPr/>
         </p:nvSpPr>
         <p:spPr>
           <a:xfrm>
-            <a:off x="8274960" y="5267160"/>
+            <a:off x="8242200" y="5267160"/>
             <a:ext cx="626040" cy="87120"/>
           </a:xfrm>
           <a:prstGeom prst="rect">
@@ -10677,7 +10543,7 @@
                 <a:latin typeface="Arial"/>
                 <a:ea typeface="Arial"/>
               </a:rPr>
-              <a:t>1.05 (P = 0.622)</a:t>
+              <a:t>1.03 (P = 0.780)</a:t>
             </a:r>
             <a:endParaRPr lang="en-US" sz="690" b="0" u="none" strike="noStrike">
               <a:solidFill>
@@ -10692,7 +10558,7 @@
       </p:sp>
       <p:sp>
         <p:nvSpPr>
-          <p:cNvPr id="222" name=""/>
+          <p:cNvPr id="219" name=""/>
           <p:cNvSpPr/>
           <p:nvPr/>
         </p:nvSpPr>
@@ -10735,13 +10601,13 @@
       </p:sp>
       <p:sp>
         <p:nvSpPr>
-          <p:cNvPr id="223" name=""/>
+          <p:cNvPr id="220" name=""/>
           <p:cNvSpPr txBox="1"/>
           <p:nvPr/>
         </p:nvSpPr>
         <p:spPr>
           <a:xfrm>
-            <a:off x="6447600" y="4601520"/>
+            <a:off x="6480000" y="4601520"/>
             <a:ext cx="626040" cy="87120"/>
           </a:xfrm>
           <a:prstGeom prst="rect">
@@ -10783,7 +10649,7 @@
       </p:sp>
       <p:sp>
         <p:nvSpPr>
-          <p:cNvPr id="224" name=""/>
+          <p:cNvPr id="221" name=""/>
           <p:cNvSpPr txBox="1"/>
           <p:nvPr/>
         </p:nvSpPr>
@@ -10831,7 +10697,7 @@
       </p:sp>
       <p:sp>
         <p:nvSpPr>
-          <p:cNvPr id="225" name=""/>
+          <p:cNvPr id="222" name=""/>
           <p:cNvSpPr txBox="1"/>
           <p:nvPr/>
         </p:nvSpPr>
@@ -10879,7 +10745,7 @@
       </p:sp>
       <p:sp>
         <p:nvSpPr>
-          <p:cNvPr id="226" name=""/>
+          <p:cNvPr id="223" name=""/>
           <p:cNvSpPr/>
           <p:nvPr/>
         </p:nvSpPr>
@@ -10922,7 +10788,7 @@
       </p:sp>
       <p:sp>
         <p:nvSpPr>
-          <p:cNvPr id="227" name=""/>
+          <p:cNvPr id="224" name=""/>
           <p:cNvSpPr/>
           <p:nvPr/>
         </p:nvSpPr>
@@ -10965,7 +10831,7 @@
       </p:sp>
       <p:sp>
         <p:nvSpPr>
-          <p:cNvPr id="228" name=""/>
+          <p:cNvPr id="225" name=""/>
           <p:cNvSpPr/>
           <p:nvPr/>
         </p:nvSpPr>
@@ -11008,7 +10874,7 @@
       </p:sp>
       <p:sp>
         <p:nvSpPr>
-          <p:cNvPr id="229" name=""/>
+          <p:cNvPr id="226" name=""/>
           <p:cNvSpPr/>
           <p:nvPr/>
         </p:nvSpPr>
@@ -11051,13 +10917,13 @@
       </p:sp>
       <p:sp>
         <p:nvSpPr>
-          <p:cNvPr id="230" name=""/>
+          <p:cNvPr id="227" name=""/>
           <p:cNvSpPr/>
           <p:nvPr/>
         </p:nvSpPr>
         <p:spPr>
           <a:xfrm flipV="1">
-            <a:off x="5831280" y="6471360"/>
+            <a:off x="5827320" y="6471360"/>
             <a:ext cx="0" cy="31680"/>
           </a:xfrm>
           <a:prstGeom prst="line">
@@ -11094,13 +10960,13 @@
       </p:sp>
       <p:sp>
         <p:nvSpPr>
-          <p:cNvPr id="231" name=""/>
+          <p:cNvPr id="228" name=""/>
           <p:cNvSpPr/>
           <p:nvPr/>
         </p:nvSpPr>
         <p:spPr>
           <a:xfrm flipV="1">
-            <a:off x="7051320" y="6471360"/>
+            <a:off x="7099560" y="6471360"/>
             <a:ext cx="0" cy="31680"/>
           </a:xfrm>
           <a:prstGeom prst="line">
@@ -11137,13 +11003,13 @@
       </p:sp>
       <p:sp>
         <p:nvSpPr>
-          <p:cNvPr id="232" name=""/>
+          <p:cNvPr id="229" name=""/>
           <p:cNvSpPr/>
           <p:nvPr/>
         </p:nvSpPr>
         <p:spPr>
           <a:xfrm flipV="1">
-            <a:off x="8271360" y="6471360"/>
+            <a:off x="8372160" y="6471360"/>
             <a:ext cx="0" cy="31680"/>
           </a:xfrm>
           <a:prstGeom prst="line">
@@ -11180,13 +11046,13 @@
       </p:sp>
       <p:sp>
         <p:nvSpPr>
-          <p:cNvPr id="233" name=""/>
+          <p:cNvPr id="230" name=""/>
           <p:cNvSpPr/>
           <p:nvPr/>
         </p:nvSpPr>
         <p:spPr>
           <a:xfrm flipV="1">
-            <a:off x="9491760" y="6471360"/>
+            <a:off x="9644400" y="6471360"/>
             <a:ext cx="0" cy="31680"/>
           </a:xfrm>
           <a:prstGeom prst="line">
@@ -11223,7 +11089,7 @@
       </p:sp>
       <p:sp>
         <p:nvSpPr>
-          <p:cNvPr id="234" name=""/>
+          <p:cNvPr id="231" name=""/>
           <p:cNvSpPr txBox="1"/>
           <p:nvPr/>
         </p:nvSpPr>
@@ -11271,13 +11137,13 @@
       </p:sp>
       <p:sp>
         <p:nvSpPr>
-          <p:cNvPr id="235" name=""/>
+          <p:cNvPr id="232" name=""/>
           <p:cNvSpPr txBox="1"/>
           <p:nvPr/>
         </p:nvSpPr>
         <p:spPr>
           <a:xfrm>
-            <a:off x="5767920" y="6515640"/>
+            <a:off x="5763960" y="6515640"/>
             <a:ext cx="142560" cy="102600"/>
           </a:xfrm>
           <a:prstGeom prst="rect">
@@ -11319,13 +11185,13 @@
       </p:sp>
       <p:sp>
         <p:nvSpPr>
-          <p:cNvPr id="236" name=""/>
+          <p:cNvPr id="233" name=""/>
           <p:cNvSpPr txBox="1"/>
           <p:nvPr/>
         </p:nvSpPr>
         <p:spPr>
           <a:xfrm>
-            <a:off x="6987960" y="6515640"/>
+            <a:off x="7036200" y="6515640"/>
             <a:ext cx="142560" cy="102600"/>
           </a:xfrm>
           <a:prstGeom prst="rect">
@@ -11367,13 +11233,13 @@
       </p:sp>
       <p:sp>
         <p:nvSpPr>
-          <p:cNvPr id="237" name=""/>
+          <p:cNvPr id="234" name=""/>
           <p:cNvSpPr txBox="1"/>
           <p:nvPr/>
         </p:nvSpPr>
         <p:spPr>
           <a:xfrm>
-            <a:off x="8208000" y="6515640"/>
+            <a:off x="8308800" y="6515640"/>
             <a:ext cx="142560" cy="102600"/>
           </a:xfrm>
           <a:prstGeom prst="rect">
@@ -11415,13 +11281,13 @@
       </p:sp>
       <p:sp>
         <p:nvSpPr>
-          <p:cNvPr id="238" name=""/>
+          <p:cNvPr id="235" name=""/>
           <p:cNvSpPr txBox="1"/>
           <p:nvPr/>
         </p:nvSpPr>
         <p:spPr>
           <a:xfrm>
-            <a:off x="9428400" y="6515640"/>
+            <a:off x="9581040" y="6515640"/>
             <a:ext cx="142560" cy="102600"/>
           </a:xfrm>
           <a:prstGeom prst="rect">
@@ -11463,7 +11329,7 @@
       </p:sp>
       <p:sp>
         <p:nvSpPr>
-          <p:cNvPr id="239" name=""/>
+          <p:cNvPr id="236" name=""/>
           <p:cNvSpPr txBox="1"/>
           <p:nvPr/>
         </p:nvSpPr>
@@ -11511,7 +11377,7 @@
       </p:sp>
       <p:sp>
         <p:nvSpPr>
-          <p:cNvPr id="240" name=""/>
+          <p:cNvPr id="237" name=""/>
           <p:cNvSpPr txBox="1"/>
           <p:nvPr/>
         </p:nvSpPr>
@@ -11559,7 +11425,7 @@
       </p:sp>
       <p:sp>
         <p:nvSpPr>
-          <p:cNvPr id="241" name=""/>
+          <p:cNvPr id="238" name=""/>
           <p:cNvSpPr txBox="1"/>
           <p:nvPr/>
         </p:nvSpPr>
@@ -11607,7 +11473,7 @@
       </p:sp>
       <p:sp>
         <p:nvSpPr>
-          <p:cNvPr id="242" name=""/>
+          <p:cNvPr id="239" name=""/>
           <p:cNvSpPr txBox="1"/>
           <p:nvPr/>
         </p:nvSpPr>
@@ -11655,7 +11521,7 @@
       </p:sp>
       <p:sp>
         <p:nvSpPr>
-          <p:cNvPr id="243" name=""/>
+          <p:cNvPr id="240" name=""/>
           <p:cNvSpPr txBox="1"/>
           <p:nvPr/>
         </p:nvSpPr>
@@ -11703,7 +11569,7 @@
       </p:sp>
       <p:sp>
         <p:nvSpPr>
-          <p:cNvPr id="244" name=""/>
+          <p:cNvPr id="241" name=""/>
           <p:cNvSpPr txBox="1"/>
           <p:nvPr/>
         </p:nvSpPr>
@@ -11751,7 +11617,7 @@
       </p:sp>
       <p:sp>
         <p:nvSpPr>
-          <p:cNvPr id="245" name=""/>
+          <p:cNvPr id="242" name=""/>
           <p:cNvSpPr txBox="1"/>
           <p:nvPr/>
         </p:nvSpPr>
